--- a/presentation.pptx
+++ b/presentation.pptx
@@ -265,7 +265,7 @@
           <a:p>
             <a:fld id="{0BB1071E-1877-7847-A17F-726A921FF884}" type="datetimeFigureOut">
               <a:rPr lang="en-HR" smtClean="0"/>
-              <a:t>14.04.2026.</a:t>
+              <a:t>15.04.2026.</a:t>
             </a:fld>
             <a:endParaRPr lang="en-HR"/>
           </a:p>
@@ -465,7 +465,7 @@
           <a:p>
             <a:fld id="{0BB1071E-1877-7847-A17F-726A921FF884}" type="datetimeFigureOut">
               <a:rPr lang="en-HR" smtClean="0"/>
-              <a:t>14.04.2026.</a:t>
+              <a:t>15.04.2026.</a:t>
             </a:fld>
             <a:endParaRPr lang="en-HR"/>
           </a:p>
@@ -675,7 +675,7 @@
           <a:p>
             <a:fld id="{0BB1071E-1877-7847-A17F-726A921FF884}" type="datetimeFigureOut">
               <a:rPr lang="en-HR" smtClean="0"/>
-              <a:t>14.04.2026.</a:t>
+              <a:t>15.04.2026.</a:t>
             </a:fld>
             <a:endParaRPr lang="en-HR"/>
           </a:p>
@@ -875,7 +875,7 @@
           <a:p>
             <a:fld id="{0BB1071E-1877-7847-A17F-726A921FF884}" type="datetimeFigureOut">
               <a:rPr lang="en-HR" smtClean="0"/>
-              <a:t>14.04.2026.</a:t>
+              <a:t>15.04.2026.</a:t>
             </a:fld>
             <a:endParaRPr lang="en-HR"/>
           </a:p>
@@ -1151,7 +1151,7 @@
           <a:p>
             <a:fld id="{0BB1071E-1877-7847-A17F-726A921FF884}" type="datetimeFigureOut">
               <a:rPr lang="en-HR" smtClean="0"/>
-              <a:t>14.04.2026.</a:t>
+              <a:t>15.04.2026.</a:t>
             </a:fld>
             <a:endParaRPr lang="en-HR"/>
           </a:p>
@@ -1419,7 +1419,7 @@
           <a:p>
             <a:fld id="{0BB1071E-1877-7847-A17F-726A921FF884}" type="datetimeFigureOut">
               <a:rPr lang="en-HR" smtClean="0"/>
-              <a:t>14.04.2026.</a:t>
+              <a:t>15.04.2026.</a:t>
             </a:fld>
             <a:endParaRPr lang="en-HR"/>
           </a:p>
@@ -1834,7 +1834,7 @@
           <a:p>
             <a:fld id="{0BB1071E-1877-7847-A17F-726A921FF884}" type="datetimeFigureOut">
               <a:rPr lang="en-HR" smtClean="0"/>
-              <a:t>14.04.2026.</a:t>
+              <a:t>15.04.2026.</a:t>
             </a:fld>
             <a:endParaRPr lang="en-HR"/>
           </a:p>
@@ -1976,7 +1976,7 @@
           <a:p>
             <a:fld id="{0BB1071E-1877-7847-A17F-726A921FF884}" type="datetimeFigureOut">
               <a:rPr lang="en-HR" smtClean="0"/>
-              <a:t>14.04.2026.</a:t>
+              <a:t>15.04.2026.</a:t>
             </a:fld>
             <a:endParaRPr lang="en-HR"/>
           </a:p>
@@ -2089,7 +2089,7 @@
           <a:p>
             <a:fld id="{0BB1071E-1877-7847-A17F-726A921FF884}" type="datetimeFigureOut">
               <a:rPr lang="en-HR" smtClean="0"/>
-              <a:t>14.04.2026.</a:t>
+              <a:t>15.04.2026.</a:t>
             </a:fld>
             <a:endParaRPr lang="en-HR"/>
           </a:p>
@@ -2402,7 +2402,7 @@
           <a:p>
             <a:fld id="{0BB1071E-1877-7847-A17F-726A921FF884}" type="datetimeFigureOut">
               <a:rPr lang="en-HR" smtClean="0"/>
-              <a:t>14.04.2026.</a:t>
+              <a:t>15.04.2026.</a:t>
             </a:fld>
             <a:endParaRPr lang="en-HR"/>
           </a:p>
@@ -2691,7 +2691,7 @@
           <a:p>
             <a:fld id="{0BB1071E-1877-7847-A17F-726A921FF884}" type="datetimeFigureOut">
               <a:rPr lang="en-HR" smtClean="0"/>
-              <a:t>14.04.2026.</a:t>
+              <a:t>15.04.2026.</a:t>
             </a:fld>
             <a:endParaRPr lang="en-HR"/>
           </a:p>
@@ -2934,7 +2934,7 @@
           <a:p>
             <a:fld id="{0BB1071E-1877-7847-A17F-726A921FF884}" type="datetimeFigureOut">
               <a:rPr lang="en-HR" smtClean="0"/>
-              <a:t>14.04.2026.</a:t>
+              <a:t>15.04.2026.</a:t>
             </a:fld>
             <a:endParaRPr lang="en-HR"/>
           </a:p>
@@ -3373,18 +3373,19 @@
           <a:lstStyle/>
           <a:p>
             <a:r>
-              <a:rPr lang="en-HR" dirty="0"/>
-              <a:t>C&amp;I Ltd. Data Engineers Task results</a:t>
-            </a:r>
-          </a:p>
-        </p:txBody>
-      </p:sp>
-      <p:sp>
-        <p:nvSpPr>
-          <p:cNvPr id="3" name="Subtitle 2">
-            <a:extLst>
-              <a:ext uri="{FF2B5EF4-FFF2-40B4-BE49-F238E27FC236}">
-                <a16:creationId xmlns:a16="http://schemas.microsoft.com/office/drawing/2014/main" id="{C88758B0-FB90-75C5-0B69-D61220DCD35B}"/>
+              <a:rPr lang="en-HR"/>
+              <a:t>Obtained results presentation</a:t>
+            </a:r>
+            <a:endParaRPr lang="en-HR" dirty="0"/>
+          </a:p>
+        </p:txBody>
+      </p:sp>
+      <p:sp>
+        <p:nvSpPr>
+          <p:cNvPr id="5" name="Subtitle 4">
+            <a:extLst>
+              <a:ext uri="{FF2B5EF4-FFF2-40B4-BE49-F238E27FC236}">
+                <a16:creationId xmlns:a16="http://schemas.microsoft.com/office/drawing/2014/main" id="{2491A3CE-9293-FD63-2F35-89CA61B4310A}"/>
               </a:ext>
             </a:extLst>
           </p:cNvPr>
@@ -3400,10 +3401,7 @@
           <a:bodyPr/>
           <a:lstStyle/>
           <a:p>
-            <a:r>
-              <a:rPr lang="en-HR" dirty="0"/>
-              <a:t>Mislav Rendulić</a:t>
-            </a:r>
+            <a:endParaRPr lang="en-HR"/>
           </a:p>
         </p:txBody>
       </p:sp>
